--- a/ai/src/ppt dataset/Blue Grey Minimalist Elegant Business Proposal Presentation.pptx
+++ b/ai/src/ppt dataset/Blue Grey Minimalist Elegant Business Proposal Presentation.pptx
@@ -3123,6 +3123,10 @@
             </a:stretch>
           </a:blipFill>
         </p:spPr>
+        <p:txBody>
+          <a:bodyPr/>
+          <a:p/>
+        </p:txBody>
       </p:sp>
       <p:sp>
         <p:nvSpPr>
@@ -3175,6 +3179,10 @@
             </a:stretch>
           </a:blipFill>
         </p:spPr>
+        <p:txBody>
+          <a:bodyPr/>
+          <a:p/>
+        </p:txBody>
       </p:sp>
       <p:sp>
         <p:nvSpPr>
@@ -3196,25 +3204,7 @@
             <a:spAutoFit/>
           </a:bodyPr>
           <a:lstStyle/>
-          <a:p>
-            <a:pPr algn="l" marL="0" indent="0" lvl="0">
-              <a:lnSpc>
-                <a:spcPts val="8834"/>
-              </a:lnSpc>
-            </a:pPr>
-            <a:r>
-              <a:rPr lang="en-US" b="true" sz="8834">
-                <a:solidFill>
-                  <a:srgbClr val="0C1116"/>
-                </a:solidFill>
-                <a:latin typeface="Ubuntu Bold"/>
-                <a:ea typeface="Ubuntu Bold"/>
-                <a:cs typeface="Ubuntu Bold"/>
-                <a:sym typeface="Ubuntu Bold"/>
-              </a:rPr>
-              <a:t>Business Proposal Overview</a:t>
-            </a:r>
-          </a:p>
+          <a:p/>
         </p:txBody>
       </p:sp>
       <p:sp>
@@ -3237,28 +3227,7 @@
             <a:spAutoFit/>
           </a:bodyPr>
           <a:lstStyle/>
-          <a:p>
-            <a:pPr algn="l" marL="0" indent="0" lvl="0">
-              <a:lnSpc>
-                <a:spcPts val="3644"/>
-              </a:lnSpc>
-              <a:spcBef>
-                <a:spcPct val="0"/>
-              </a:spcBef>
-            </a:pPr>
-            <a:r>
-              <a:rPr lang="en-US" sz="2602">
-                <a:solidFill>
-                  <a:srgbClr val="0C1116"/>
-                </a:solidFill>
-                <a:latin typeface="Ubuntu"/>
-                <a:ea typeface="Ubuntu"/>
-                <a:cs typeface="Ubuntu"/>
-                <a:sym typeface="Ubuntu"/>
-              </a:rPr>
-              <a:t>A comprehensive proposal for enhancing operational efficiency and profitability</a:t>
-            </a:r>
-          </a:p>
+          <a:p/>
         </p:txBody>
       </p:sp>
       <p:sp>
@@ -3281,40 +3250,7 @@
             <a:spAutoFit/>
           </a:bodyPr>
           <a:lstStyle/>
-          <a:p>
-            <a:pPr algn="l" marL="0" indent="0" lvl="0">
-              <a:lnSpc>
-                <a:spcPts val="2939"/>
-              </a:lnSpc>
-              <a:spcBef>
-                <a:spcPct val="0"/>
-              </a:spcBef>
-            </a:pPr>
-            <a:r>
-              <a:rPr lang="en-US" sz="2099">
-                <a:solidFill>
-                  <a:srgbClr val="0C1116"/>
-                </a:solidFill>
-                <a:latin typeface="Ubuntu"/>
-                <a:ea typeface="Ubuntu"/>
-                <a:cs typeface="Ubuntu"/>
-                <a:sym typeface="Ubuntu"/>
-              </a:rPr>
-              <a:t>G</a:t>
-            </a:r>
-            <a:r>
-              <a:rPr lang="en-US" sz="2099">
-                <a:solidFill>
-                  <a:srgbClr val="0C1116"/>
-                </a:solidFill>
-                <a:latin typeface="Ubuntu"/>
-                <a:ea typeface="Ubuntu"/>
-                <a:cs typeface="Ubuntu"/>
-                <a:sym typeface="Ubuntu"/>
-              </a:rPr>
-              <a:t>inyard International Co.</a:t>
-            </a:r>
-          </a:p>
+          <a:p/>
         </p:txBody>
       </p:sp>
       <p:sp>
@@ -3337,28 +3273,7 @@
             <a:spAutoFit/>
           </a:bodyPr>
           <a:lstStyle/>
-          <a:p>
-            <a:pPr algn="r" marL="0" indent="0" lvl="0">
-              <a:lnSpc>
-                <a:spcPts val="2939"/>
-              </a:lnSpc>
-              <a:spcBef>
-                <a:spcPct val="0"/>
-              </a:spcBef>
-            </a:pPr>
-            <a:r>
-              <a:rPr lang="en-US" sz="2099">
-                <a:solidFill>
-                  <a:srgbClr val="0C1116"/>
-                </a:solidFill>
-                <a:latin typeface="Ubuntu"/>
-                <a:ea typeface="Ubuntu"/>
-                <a:cs typeface="Ubuntu"/>
-                <a:sym typeface="Ubuntu"/>
-              </a:rPr>
-              <a:t>2026</a:t>
-            </a:r>
-          </a:p>
+          <a:p/>
         </p:txBody>
       </p:sp>
     </p:spTree>
@@ -3428,6 +3343,10 @@
             <a:tailEnd type="none" len="sm" w="sm"/>
           </a:ln>
         </p:spPr>
+        <p:txBody>
+          <a:bodyPr/>
+          <a:p/>
+        </p:txBody>
       </p:sp>
       <p:sp>
         <p:nvSpPr>
@@ -3480,6 +3399,10 @@
             </a:stretch>
           </a:blipFill>
         </p:spPr>
+        <p:txBody>
+          <a:bodyPr/>
+          <a:p/>
+        </p:txBody>
       </p:sp>
       <p:sp>
         <p:nvSpPr>
@@ -3504,6 +3427,10 @@
             <a:tailEnd type="none" len="sm" w="sm"/>
           </a:ln>
         </p:spPr>
+        <p:txBody>
+          <a:bodyPr/>
+          <a:p/>
+        </p:txBody>
       </p:sp>
       <p:sp>
         <p:nvSpPr>
@@ -3556,6 +3483,10 @@
             </a:stretch>
           </a:blipFill>
         </p:spPr>
+        <p:txBody>
+          <a:bodyPr/>
+          <a:p/>
+        </p:txBody>
       </p:sp>
       <p:sp>
         <p:nvSpPr>
@@ -3608,6 +3539,10 @@
             </a:stretch>
           </a:blipFill>
         </p:spPr>
+        <p:txBody>
+          <a:bodyPr/>
+          <a:p/>
+        </p:txBody>
       </p:sp>
       <p:sp>
         <p:nvSpPr>
@@ -3629,28 +3564,7 @@
             <a:spAutoFit/>
           </a:bodyPr>
           <a:lstStyle/>
-          <a:p>
-            <a:pPr algn="l" marL="0" indent="0" lvl="0">
-              <a:lnSpc>
-                <a:spcPts val="7755"/>
-              </a:lnSpc>
-              <a:spcBef>
-                <a:spcPct val="0"/>
-              </a:spcBef>
-            </a:pPr>
-            <a:r>
-              <a:rPr lang="en-US" b="true" sz="6462" strike="noStrike" u="none">
-                <a:solidFill>
-                  <a:srgbClr val="0C1116"/>
-                </a:solidFill>
-                <a:latin typeface="Ubuntu Bold"/>
-                <a:ea typeface="Ubuntu Bold"/>
-                <a:cs typeface="Ubuntu Bold"/>
-                <a:sym typeface="Ubuntu Bold"/>
-              </a:rPr>
-              <a:t>Get in touch with us for more information</a:t>
-            </a:r>
-          </a:p>
+          <a:p/>
         </p:txBody>
       </p:sp>
       <p:sp>
@@ -3673,28 +3587,7 @@
             <a:spAutoFit/>
           </a:bodyPr>
           <a:lstStyle/>
-          <a:p>
-            <a:pPr algn="l" marL="0" indent="0" lvl="0">
-              <a:lnSpc>
-                <a:spcPts val="3120"/>
-              </a:lnSpc>
-              <a:spcBef>
-                <a:spcPct val="0"/>
-              </a:spcBef>
-            </a:pPr>
-            <a:r>
-              <a:rPr lang="en-US" sz="2400" strike="noStrike" u="none">
-                <a:solidFill>
-                  <a:srgbClr val="0C1116"/>
-                </a:solidFill>
-                <a:latin typeface="Ubuntu"/>
-                <a:ea typeface="Ubuntu"/>
-                <a:cs typeface="Ubuntu"/>
-                <a:sym typeface="Ubuntu"/>
-              </a:rPr>
-              <a:t>Email </a:t>
-            </a:r>
-          </a:p>
+          <a:p/>
         </p:txBody>
       </p:sp>
       <p:sp>
@@ -3717,28 +3610,7 @@
             <a:spAutoFit/>
           </a:bodyPr>
           <a:lstStyle/>
-          <a:p>
-            <a:pPr algn="l" marL="0" indent="0" lvl="0">
-              <a:lnSpc>
-                <a:spcPts val="3900"/>
-              </a:lnSpc>
-              <a:spcBef>
-                <a:spcPct val="0"/>
-              </a:spcBef>
-            </a:pPr>
-            <a:r>
-              <a:rPr lang="en-US" b="true" sz="3000" strike="noStrike" u="none">
-                <a:solidFill>
-                  <a:srgbClr val="0C1116"/>
-                </a:solidFill>
-                <a:latin typeface="Ubuntu Bold"/>
-                <a:ea typeface="Ubuntu Bold"/>
-                <a:cs typeface="Ubuntu Bold"/>
-                <a:sym typeface="Ubuntu Bold"/>
-              </a:rPr>
-              <a:t>hello@reallygreatsite.com</a:t>
-            </a:r>
-          </a:p>
+          <a:p/>
         </p:txBody>
       </p:sp>
       <p:sp>
@@ -3761,28 +3633,7 @@
             <a:spAutoFit/>
           </a:bodyPr>
           <a:lstStyle/>
-          <a:p>
-            <a:pPr algn="l" marL="0" indent="0" lvl="0">
-              <a:lnSpc>
-                <a:spcPts val="3120"/>
-              </a:lnSpc>
-              <a:spcBef>
-                <a:spcPct val="0"/>
-              </a:spcBef>
-            </a:pPr>
-            <a:r>
-              <a:rPr lang="en-US" sz="2400" strike="noStrike" u="none">
-                <a:solidFill>
-                  <a:srgbClr val="0C1116"/>
-                </a:solidFill>
-                <a:latin typeface="Ubuntu"/>
-                <a:ea typeface="Ubuntu"/>
-                <a:cs typeface="Ubuntu"/>
-                <a:sym typeface="Ubuntu"/>
-              </a:rPr>
-              <a:t>Social media </a:t>
-            </a:r>
-          </a:p>
+          <a:p/>
         </p:txBody>
       </p:sp>
       <p:sp>
@@ -3805,28 +3656,7 @@
             <a:spAutoFit/>
           </a:bodyPr>
           <a:lstStyle/>
-          <a:p>
-            <a:pPr algn="l" marL="0" indent="0" lvl="0">
-              <a:lnSpc>
-                <a:spcPts val="3900"/>
-              </a:lnSpc>
-              <a:spcBef>
-                <a:spcPct val="0"/>
-              </a:spcBef>
-            </a:pPr>
-            <a:r>
-              <a:rPr lang="en-US" b="true" sz="3000" strike="noStrike" u="none">
-                <a:solidFill>
-                  <a:srgbClr val="0C1116"/>
-                </a:solidFill>
-                <a:latin typeface="Ubuntu Bold"/>
-                <a:ea typeface="Ubuntu Bold"/>
-                <a:cs typeface="Ubuntu Bold"/>
-                <a:sym typeface="Ubuntu Bold"/>
-              </a:rPr>
-              <a:t>@reallygreatsite</a:t>
-            </a:r>
-          </a:p>
+          <a:p/>
         </p:txBody>
       </p:sp>
       <p:sp>
@@ -3849,28 +3679,7 @@
             <a:spAutoFit/>
           </a:bodyPr>
           <a:lstStyle/>
-          <a:p>
-            <a:pPr algn="l" marL="0" indent="0" lvl="0">
-              <a:lnSpc>
-                <a:spcPts val="3120"/>
-              </a:lnSpc>
-              <a:spcBef>
-                <a:spcPct val="0"/>
-              </a:spcBef>
-            </a:pPr>
-            <a:r>
-              <a:rPr lang="en-US" sz="2400" strike="noStrike" u="none">
-                <a:solidFill>
-                  <a:srgbClr val="0C1116"/>
-                </a:solidFill>
-                <a:latin typeface="Ubuntu"/>
-                <a:ea typeface="Ubuntu"/>
-                <a:cs typeface="Ubuntu"/>
-                <a:sym typeface="Ubuntu"/>
-              </a:rPr>
-              <a:t>Phone</a:t>
-            </a:r>
-          </a:p>
+          <a:p/>
         </p:txBody>
       </p:sp>
       <p:sp>
@@ -3893,28 +3702,7 @@
             <a:spAutoFit/>
           </a:bodyPr>
           <a:lstStyle/>
-          <a:p>
-            <a:pPr algn="l" marL="0" indent="0" lvl="0">
-              <a:lnSpc>
-                <a:spcPts val="3900"/>
-              </a:lnSpc>
-              <a:spcBef>
-                <a:spcPct val="0"/>
-              </a:spcBef>
-            </a:pPr>
-            <a:r>
-              <a:rPr lang="en-US" b="true" sz="3000" strike="noStrike" u="none">
-                <a:solidFill>
-                  <a:srgbClr val="0C1116"/>
-                </a:solidFill>
-                <a:latin typeface="Ubuntu Bold"/>
-                <a:ea typeface="Ubuntu Bold"/>
-                <a:cs typeface="Ubuntu Bold"/>
-                <a:sym typeface="Ubuntu Bold"/>
-              </a:rPr>
-              <a:t>123-456-7890</a:t>
-            </a:r>
-          </a:p>
+          <a:p/>
         </p:txBody>
       </p:sp>
       <p:sp>
@@ -3968,6 +3756,10 @@
             </a:stretch>
           </a:blipFill>
         </p:spPr>
+        <p:txBody>
+          <a:bodyPr/>
+          <a:p/>
+        </p:txBody>
       </p:sp>
     </p:spTree>
   </p:cSld>
@@ -4036,6 +3828,10 @@
             <a:tailEnd type="none" len="sm" w="sm"/>
           </a:ln>
         </p:spPr>
+        <p:txBody>
+          <a:bodyPr/>
+          <a:p/>
+        </p:txBody>
       </p:sp>
       <p:sp>
         <p:nvSpPr>
@@ -4060,6 +3856,10 @@
             <a:tailEnd type="none" len="sm" w="sm"/>
           </a:ln>
         </p:spPr>
+        <p:txBody>
+          <a:bodyPr/>
+          <a:p/>
+        </p:txBody>
       </p:sp>
       <p:sp>
         <p:nvSpPr>
@@ -4084,6 +3884,10 @@
             <a:tailEnd type="none" len="sm" w="sm"/>
           </a:ln>
         </p:spPr>
+        <p:txBody>
+          <a:bodyPr/>
+          <a:p/>
+        </p:txBody>
       </p:sp>
       <p:sp>
         <p:nvSpPr>
@@ -4108,6 +3912,10 @@
             <a:tailEnd type="none" len="sm" w="sm"/>
           </a:ln>
         </p:spPr>
+        <p:txBody>
+          <a:bodyPr/>
+          <a:p/>
+        </p:txBody>
       </p:sp>
       <p:sp>
         <p:nvSpPr>
@@ -4132,6 +3940,10 @@
             <a:tailEnd type="none" len="sm" w="sm"/>
           </a:ln>
         </p:spPr>
+        <p:txBody>
+          <a:bodyPr/>
+          <a:p/>
+        </p:txBody>
       </p:sp>
       <p:sp>
         <p:nvSpPr>
@@ -4184,6 +3996,10 @@
             </a:stretch>
           </a:blipFill>
         </p:spPr>
+        <p:txBody>
+          <a:bodyPr/>
+          <a:p/>
+        </p:txBody>
       </p:sp>
       <p:sp>
         <p:nvSpPr>
@@ -4205,25 +4021,7 @@
             <a:spAutoFit/>
           </a:bodyPr>
           <a:lstStyle/>
-          <a:p>
-            <a:pPr algn="l" marL="0" indent="0" lvl="0">
-              <a:lnSpc>
-                <a:spcPts val="9000"/>
-              </a:lnSpc>
-            </a:pPr>
-            <a:r>
-              <a:rPr lang="en-US" b="true" sz="9000">
-                <a:solidFill>
-                  <a:srgbClr val="0C1116"/>
-                </a:solidFill>
-                <a:latin typeface="Ubuntu Bold"/>
-                <a:ea typeface="Ubuntu Bold"/>
-                <a:cs typeface="Ubuntu Bold"/>
-                <a:sym typeface="Ubuntu Bold"/>
-              </a:rPr>
-              <a:t>Agenda for Business Proposal</a:t>
-            </a:r>
-          </a:p>
+          <a:p/>
         </p:txBody>
       </p:sp>
       <p:sp>
@@ -4246,25 +4044,7 @@
             <a:spAutoFit/>
           </a:bodyPr>
           <a:lstStyle/>
-          <a:p>
-            <a:pPr algn="l" marL="0" indent="0" lvl="0">
-              <a:lnSpc>
-                <a:spcPts val="4160"/>
-              </a:lnSpc>
-            </a:pPr>
-            <a:r>
-              <a:rPr lang="en-US" sz="3200">
-                <a:solidFill>
-                  <a:srgbClr val="0C1116"/>
-                </a:solidFill>
-                <a:latin typeface="Ubuntu"/>
-                <a:ea typeface="Ubuntu"/>
-                <a:cs typeface="Ubuntu"/>
-                <a:sym typeface="Ubuntu"/>
-              </a:rPr>
-              <a:t>This presentation outlines the key sections we will cover.</a:t>
-            </a:r>
-          </a:p>
+          <a:p/>
         </p:txBody>
       </p:sp>
       <p:sp>
@@ -4287,25 +4067,7 @@
             <a:spAutoFit/>
           </a:bodyPr>
           <a:lstStyle/>
-          <a:p>
-            <a:pPr algn="l" marL="0" indent="0" lvl="0">
-              <a:lnSpc>
-                <a:spcPts val="3380"/>
-              </a:lnSpc>
-            </a:pPr>
-            <a:r>
-              <a:rPr lang="en-US" sz="2600">
-                <a:solidFill>
-                  <a:srgbClr val="0C1116"/>
-                </a:solidFill>
-                <a:latin typeface="Ubuntu"/>
-                <a:ea typeface="Ubuntu"/>
-                <a:cs typeface="Ubuntu"/>
-                <a:sym typeface="Ubuntu"/>
-              </a:rPr>
-              <a:t>Executive Summary and Objectives</a:t>
-            </a:r>
-          </a:p>
+          <a:p/>
         </p:txBody>
       </p:sp>
       <p:sp>
@@ -4328,25 +4090,7 @@
             <a:spAutoFit/>
           </a:bodyPr>
           <a:lstStyle/>
-          <a:p>
-            <a:pPr algn="l" marL="0" indent="0" lvl="0">
-              <a:lnSpc>
-                <a:spcPts val="3380"/>
-              </a:lnSpc>
-            </a:pPr>
-            <a:r>
-              <a:rPr lang="en-US" sz="2600">
-                <a:solidFill>
-                  <a:srgbClr val="0C1116"/>
-                </a:solidFill>
-                <a:latin typeface="Ubuntu"/>
-                <a:ea typeface="Ubuntu"/>
-                <a:cs typeface="Ubuntu"/>
-                <a:sym typeface="Ubuntu"/>
-              </a:rPr>
-              <a:t>Market Analysis and Trends</a:t>
-            </a:r>
-          </a:p>
+          <a:p/>
         </p:txBody>
       </p:sp>
       <p:sp>
@@ -4369,25 +4113,7 @@
             <a:spAutoFit/>
           </a:bodyPr>
           <a:lstStyle/>
-          <a:p>
-            <a:pPr algn="l" marL="0" indent="0" lvl="0">
-              <a:lnSpc>
-                <a:spcPts val="3380"/>
-              </a:lnSpc>
-            </a:pPr>
-            <a:r>
-              <a:rPr lang="en-US" sz="2600">
-                <a:solidFill>
-                  <a:srgbClr val="0C1116"/>
-                </a:solidFill>
-                <a:latin typeface="Ubuntu"/>
-                <a:ea typeface="Ubuntu"/>
-                <a:cs typeface="Ubuntu"/>
-                <a:sym typeface="Ubuntu"/>
-              </a:rPr>
-              <a:t>Strategic Approach and Implementation</a:t>
-            </a:r>
-          </a:p>
+          <a:p/>
         </p:txBody>
       </p:sp>
       <p:sp>
@@ -4410,25 +4136,7 @@
             <a:spAutoFit/>
           </a:bodyPr>
           <a:lstStyle/>
-          <a:p>
-            <a:pPr algn="l" marL="0" indent="0" lvl="0">
-              <a:lnSpc>
-                <a:spcPts val="3380"/>
-              </a:lnSpc>
-            </a:pPr>
-            <a:r>
-              <a:rPr lang="en-US" sz="2600">
-                <a:solidFill>
-                  <a:srgbClr val="0C1116"/>
-                </a:solidFill>
-                <a:latin typeface="Ubuntu"/>
-                <a:ea typeface="Ubuntu"/>
-                <a:cs typeface="Ubuntu"/>
-                <a:sym typeface="Ubuntu"/>
-              </a:rPr>
-              <a:t>Financial Projections and Budget</a:t>
-            </a:r>
-          </a:p>
+          <a:p/>
         </p:txBody>
       </p:sp>
       <p:sp>
@@ -4451,25 +4159,7 @@
             <a:spAutoFit/>
           </a:bodyPr>
           <a:lstStyle/>
-          <a:p>
-            <a:pPr algn="l" marL="0" indent="0" lvl="0">
-              <a:lnSpc>
-                <a:spcPts val="3380"/>
-              </a:lnSpc>
-            </a:pPr>
-            <a:r>
-              <a:rPr lang="en-US" sz="2600">
-                <a:solidFill>
-                  <a:srgbClr val="0C1116"/>
-                </a:solidFill>
-                <a:latin typeface="Ubuntu"/>
-                <a:ea typeface="Ubuntu"/>
-                <a:cs typeface="Ubuntu"/>
-                <a:sym typeface="Ubuntu"/>
-              </a:rPr>
-              <a:t>Conclusion and Next Steps</a:t>
-            </a:r>
-          </a:p>
+          <a:p/>
         </p:txBody>
       </p:sp>
       <p:sp>
@@ -4523,6 +4213,10 @@
             </a:stretch>
           </a:blipFill>
         </p:spPr>
+        <p:txBody>
+          <a:bodyPr/>
+          <a:p/>
+        </p:txBody>
       </p:sp>
     </p:spTree>
   </p:cSld>
@@ -4619,6 +4313,10 @@
             </a:stretch>
           </a:blipFill>
         </p:spPr>
+        <p:txBody>
+          <a:bodyPr/>
+          <a:p/>
+        </p:txBody>
       </p:sp>
       <p:sp>
         <p:nvSpPr>
@@ -4643,6 +4341,10 @@
             <a:tailEnd type="none" len="sm" w="sm"/>
           </a:ln>
         </p:spPr>
+        <p:txBody>
+          <a:bodyPr/>
+          <a:p/>
+        </p:txBody>
       </p:sp>
       <p:sp>
         <p:nvSpPr>
@@ -4689,6 +4391,10 @@
             </a:stretch>
           </a:blipFill>
         </p:spPr>
+        <p:txBody>
+          <a:bodyPr/>
+          <a:p/>
+        </p:txBody>
       </p:sp>
       <p:sp>
         <p:nvSpPr>
@@ -4710,25 +4416,7 @@
             <a:spAutoFit/>
           </a:bodyPr>
           <a:lstStyle/>
-          <a:p>
-            <a:pPr algn="l" marL="0" indent="0" lvl="0">
-              <a:lnSpc>
-                <a:spcPts val="3840"/>
-              </a:lnSpc>
-            </a:pPr>
-            <a:r>
-              <a:rPr lang="en-US" b="true" sz="3200">
-                <a:solidFill>
-                  <a:srgbClr val="0C1116"/>
-                </a:solidFill>
-                <a:latin typeface="Ubuntu Bold"/>
-                <a:ea typeface="Ubuntu Bold"/>
-                <a:cs typeface="Ubuntu Bold"/>
-                <a:sym typeface="Ubuntu Bold"/>
-              </a:rPr>
-              <a:t>Introducing Our Vision</a:t>
-            </a:r>
-          </a:p>
+          <a:p/>
         </p:txBody>
       </p:sp>
       <p:sp>
@@ -4751,25 +4439,7 @@
             <a:spAutoFit/>
           </a:bodyPr>
           <a:lstStyle/>
-          <a:p>
-            <a:pPr algn="l" marL="0" indent="0" lvl="0">
-              <a:lnSpc>
-                <a:spcPts val="6500"/>
-              </a:lnSpc>
-            </a:pPr>
-            <a:r>
-              <a:rPr lang="en-US" sz="5000">
-                <a:solidFill>
-                  <a:srgbClr val="0C1116"/>
-                </a:solidFill>
-                <a:latin typeface="Ubuntu"/>
-                <a:ea typeface="Ubuntu"/>
-                <a:cs typeface="Ubuntu"/>
-                <a:sym typeface="Ubuntu"/>
-              </a:rPr>
-              <a:t>Our Vision for a Sustainable and Innovative Future in Business</a:t>
-            </a:r>
-          </a:p>
+          <a:p/>
         </p:txBody>
       </p:sp>
       <p:sp>
@@ -4792,25 +4462,7 @@
             <a:spAutoFit/>
           </a:bodyPr>
           <a:lstStyle/>
-          <a:p>
-            <a:pPr algn="l" marL="0" indent="0" lvl="0">
-              <a:lnSpc>
-                <a:spcPts val="4160"/>
-              </a:lnSpc>
-            </a:pPr>
-            <a:r>
-              <a:rPr lang="en-US" sz="3200">
-                <a:solidFill>
-                  <a:srgbClr val="0C1116"/>
-                </a:solidFill>
-                <a:latin typeface="Ubuntu"/>
-                <a:ea typeface="Ubuntu"/>
-                <a:cs typeface="Ubuntu"/>
-                <a:sym typeface="Ubuntu"/>
-              </a:rPr>
-              <a:t>Building strong foundations for lasting success and growth in our industry.</a:t>
-            </a:r>
-          </a:p>
+          <a:p/>
         </p:txBody>
       </p:sp>
       <p:sp>
@@ -4833,49 +4485,7 @@
             <a:spAutoFit/>
           </a:bodyPr>
           <a:lstStyle/>
-          <a:p>
-            <a:pPr algn="l" marL="0" indent="0" lvl="0">
-              <a:lnSpc>
-                <a:spcPts val="3120"/>
-              </a:lnSpc>
-            </a:pPr>
-            <a:r>
-              <a:rPr lang="en-US" sz="2400">
-                <a:solidFill>
-                  <a:srgbClr val="0C1116"/>
-                </a:solidFill>
-                <a:latin typeface="Ubuntu"/>
-                <a:ea typeface="Ubuntu"/>
-                <a:cs typeface="Ubuntu"/>
-                <a:sym typeface="Ubuntu"/>
-              </a:rPr>
-              <a:t>At the heart of our strategy lies a commitment to </a:t>
-            </a:r>
-            <a:r>
-              <a:rPr lang="en-US" b="true" sz="2400">
-                <a:solidFill>
-                  <a:srgbClr val="0C1116"/>
-                </a:solidFill>
-                <a:latin typeface="Ubuntu Bold"/>
-                <a:ea typeface="Ubuntu Bold"/>
-                <a:cs typeface="Ubuntu Bold"/>
-                <a:sym typeface="Ubuntu Bold"/>
-              </a:rPr>
-              <a:t>innovation and sustainability</a:t>
-            </a:r>
-            <a:r>
-              <a:rPr lang="en-US" sz="2400">
-                <a:solidFill>
-                  <a:srgbClr val="0C1116"/>
-                </a:solidFill>
-                <a:latin typeface="Ubuntu"/>
-                <a:ea typeface="Ubuntu"/>
-                <a:cs typeface="Ubuntu"/>
-                <a:sym typeface="Ubuntu"/>
-              </a:rPr>
-              <a:t>, ensuring that our solutions meet both current and future business challenges effectively.</a:t>
-            </a:r>
-          </a:p>
+          <a:p/>
         </p:txBody>
       </p:sp>
     </p:spTree>
@@ -4967,6 +4577,10 @@
             </a:stretch>
           </a:blipFill>
         </p:spPr>
+        <p:txBody>
+          <a:bodyPr/>
+          <a:p/>
+        </p:txBody>
       </p:sp>
       <p:sp>
         <p:nvSpPr>
@@ -4988,25 +4602,7 @@
             <a:spAutoFit/>
           </a:bodyPr>
           <a:lstStyle/>
-          <a:p>
-            <a:pPr algn="l" marL="0" indent="0" lvl="0">
-              <a:lnSpc>
-                <a:spcPts val="8032"/>
-              </a:lnSpc>
-            </a:pPr>
-            <a:r>
-              <a:rPr lang="en-US" b="true" sz="6693">
-                <a:solidFill>
-                  <a:srgbClr val="0C1116"/>
-                </a:solidFill>
-                <a:latin typeface="Ubuntu Bold"/>
-                <a:ea typeface="Ubuntu Bold"/>
-                <a:cs typeface="Ubuntu Bold"/>
-                <a:sym typeface="Ubuntu Bold"/>
-              </a:rPr>
-              <a:t>Current Market Trends</a:t>
-            </a:r>
-          </a:p>
+          <a:p/>
         </p:txBody>
       </p:sp>
       <p:grpSp>
@@ -5181,6 +4777,10 @@
             </a:stretch>
           </a:blipFill>
         </p:spPr>
+        <p:txBody>
+          <a:bodyPr/>
+          <a:p/>
+        </p:txBody>
       </p:sp>
     </p:spTree>
   </p:cSld>
@@ -5277,6 +4877,10 @@
             </a:stretch>
           </a:blipFill>
         </p:spPr>
+        <p:txBody>
+          <a:bodyPr/>
+          <a:p/>
+        </p:txBody>
       </p:sp>
       <p:grpSp>
         <p:nvGrpSpPr>
@@ -5532,6 +5136,10 @@
             </a:stretch>
           </a:blipFill>
         </p:spPr>
+        <p:txBody>
+          <a:bodyPr/>
+          <a:p/>
+        </p:txBody>
       </p:sp>
     </p:spTree>
   </p:cSld>
@@ -5628,6 +5236,10 @@
             </a:stretch>
           </a:blipFill>
         </p:spPr>
+        <p:txBody>
+          <a:bodyPr/>
+          <a:p/>
+        </p:txBody>
       </p:sp>
       <p:sp>
         <p:nvSpPr>
@@ -5649,25 +5261,7 @@
             <a:spAutoFit/>
           </a:bodyPr>
           <a:lstStyle/>
-          <a:p>
-            <a:pPr algn="l" marL="0" indent="0" lvl="0">
-              <a:lnSpc>
-                <a:spcPts val="10800"/>
-              </a:lnSpc>
-            </a:pPr>
-            <a:r>
-              <a:rPr lang="en-US" b="true" sz="9000">
-                <a:solidFill>
-                  <a:srgbClr val="0C1116"/>
-                </a:solidFill>
-                <a:latin typeface="Ubuntu Bold"/>
-                <a:ea typeface="Ubuntu Bold"/>
-                <a:cs typeface="Ubuntu Bold"/>
-                <a:sym typeface="Ubuntu Bold"/>
-              </a:rPr>
-              <a:t>Our Unique Value Proposition</a:t>
-            </a:r>
-          </a:p>
+          <a:p/>
         </p:txBody>
       </p:sp>
       <p:sp>
@@ -5721,6 +5315,10 @@
             </a:stretch>
           </a:blipFill>
         </p:spPr>
+        <p:txBody>
+          <a:bodyPr/>
+          <a:p/>
+        </p:txBody>
       </p:sp>
       <p:sp>
         <p:nvSpPr>
@@ -5742,25 +5340,7 @@
             <a:spAutoFit/>
           </a:bodyPr>
           <a:lstStyle/>
-          <a:p>
-            <a:pPr algn="l" marL="0" indent="0" lvl="0">
-              <a:lnSpc>
-                <a:spcPts val="3380"/>
-              </a:lnSpc>
-            </a:pPr>
-            <a:r>
-              <a:rPr lang="en-US" b="true" sz="2600">
-                <a:solidFill>
-                  <a:srgbClr val="0C1116"/>
-                </a:solidFill>
-                <a:latin typeface="Ubuntu Bold"/>
-                <a:ea typeface="Ubuntu Bold"/>
-                <a:cs typeface="Ubuntu Bold"/>
-                <a:sym typeface="Ubuntu Bold"/>
-              </a:rPr>
-              <a:t>Innovative Solutions for Every Challenge</a:t>
-            </a:r>
-          </a:p>
+          <a:p/>
         </p:txBody>
       </p:sp>
       <p:sp>
@@ -5783,25 +5363,7 @@
             <a:spAutoFit/>
           </a:bodyPr>
           <a:lstStyle/>
-          <a:p>
-            <a:pPr algn="l" marL="0" indent="0" lvl="0">
-              <a:lnSpc>
-                <a:spcPts val="3380"/>
-              </a:lnSpc>
-            </a:pPr>
-            <a:r>
-              <a:rPr lang="en-US" b="true" sz="2600">
-                <a:solidFill>
-                  <a:srgbClr val="0C1116"/>
-                </a:solidFill>
-                <a:latin typeface="Ubuntu Bold"/>
-                <a:ea typeface="Ubuntu Bold"/>
-                <a:cs typeface="Ubuntu Bold"/>
-                <a:sym typeface="Ubuntu Bold"/>
-              </a:rPr>
-              <a:t>Competitive Pricing that Drives Value</a:t>
-            </a:r>
-          </a:p>
+          <a:p/>
         </p:txBody>
       </p:sp>
       <p:sp>
@@ -5824,25 +5386,7 @@
             <a:spAutoFit/>
           </a:bodyPr>
           <a:lstStyle/>
-          <a:p>
-            <a:pPr algn="l" marL="0" indent="0" lvl="0">
-              <a:lnSpc>
-                <a:spcPts val="3380"/>
-              </a:lnSpc>
-            </a:pPr>
-            <a:r>
-              <a:rPr lang="en-US" b="true" sz="2600">
-                <a:solidFill>
-                  <a:srgbClr val="0C1116"/>
-                </a:solidFill>
-                <a:latin typeface="Ubuntu Bold"/>
-                <a:ea typeface="Ubuntu Bold"/>
-                <a:cs typeface="Ubuntu Bold"/>
-                <a:sym typeface="Ubuntu Bold"/>
-              </a:rPr>
-              <a:t>Exceptional Support When You Need It</a:t>
-            </a:r>
-          </a:p>
+          <a:p/>
         </p:txBody>
       </p:sp>
       <p:sp>
@@ -5865,25 +5409,7 @@
             <a:spAutoFit/>
           </a:bodyPr>
           <a:lstStyle/>
-          <a:p>
-            <a:pPr algn="l" marL="0" indent="0" lvl="0">
-              <a:lnSpc>
-                <a:spcPts val="3120"/>
-              </a:lnSpc>
-            </a:pPr>
-            <a:r>
-              <a:rPr lang="en-US" sz="2400">
-                <a:solidFill>
-                  <a:srgbClr val="0C1116"/>
-                </a:solidFill>
-                <a:latin typeface="Ubuntu"/>
-                <a:ea typeface="Ubuntu"/>
-                <a:cs typeface="Ubuntu"/>
-                <a:sym typeface="Ubuntu"/>
-              </a:rPr>
-              <a:t>We offer tailored strategies that maximize efficiency and effectiveness.</a:t>
-            </a:r>
-          </a:p>
+          <a:p/>
         </p:txBody>
       </p:sp>
       <p:sp>
@@ -5906,28 +5432,7 @@
             <a:spAutoFit/>
           </a:bodyPr>
           <a:lstStyle/>
-          <a:p>
-            <a:pPr algn="l" marL="0" indent="0" lvl="0">
-              <a:lnSpc>
-                <a:spcPts val="3120"/>
-              </a:lnSpc>
-              <a:spcBef>
-                <a:spcPct val="0"/>
-              </a:spcBef>
-            </a:pPr>
-            <a:r>
-              <a:rPr lang="en-US" sz="2400" strike="noStrike" u="none">
-                <a:solidFill>
-                  <a:srgbClr val="0C1116"/>
-                </a:solidFill>
-                <a:latin typeface="Ubuntu"/>
-                <a:ea typeface="Ubuntu"/>
-                <a:cs typeface="Ubuntu"/>
-                <a:sym typeface="Ubuntu"/>
-              </a:rPr>
-              <a:t>Our pricing model ensures affordability without sacrificing quality or service.</a:t>
-            </a:r>
-          </a:p>
+          <a:p/>
         </p:txBody>
       </p:sp>
       <p:sp>
@@ -5950,28 +5455,7 @@
             <a:spAutoFit/>
           </a:bodyPr>
           <a:lstStyle/>
-          <a:p>
-            <a:pPr algn="l" marL="0" indent="0" lvl="0">
-              <a:lnSpc>
-                <a:spcPts val="3120"/>
-              </a:lnSpc>
-              <a:spcBef>
-                <a:spcPct val="0"/>
-              </a:spcBef>
-            </a:pPr>
-            <a:r>
-              <a:rPr lang="en-US" sz="2400" strike="noStrike" u="none">
-                <a:solidFill>
-                  <a:srgbClr val="0C1116"/>
-                </a:solidFill>
-                <a:latin typeface="Ubuntu"/>
-                <a:ea typeface="Ubuntu"/>
-                <a:cs typeface="Ubuntu"/>
-                <a:sym typeface="Ubuntu"/>
-              </a:rPr>
-              <a:t>Our dedicated team is here to assist you at every step.</a:t>
-            </a:r>
-          </a:p>
+          <a:p/>
         </p:txBody>
       </p:sp>
     </p:spTree>
@@ -6018,30 +5502,6 @@
           <a:chExt cx="0" cy="0"/>
         </a:xfrm>
       </p:grpSpPr>
-      <p:pic>
-        <p:nvPicPr>
-          <p:cNvPr name="Picture 2" id="2"/>
-          <p:cNvPicPr>
-            <a:picLocks noChangeAspect="true"/>
-          </p:cNvPicPr>
-          <p:nvPr/>
-        </p:nvPicPr>
-        <p:blipFill>
-          <a:blip r:embed="rId2"/>
-          <a:stretch>
-            <a:fillRect/>
-          </a:stretch>
-        </p:blipFill>
-        <p:spPr>
-          <a:xfrm rot="0">
-            <a:off x="8233269" y="4235107"/>
-            <a:ext cx="9846580" cy="5736216"/>
-          </a:xfrm>
-          <a:prstGeom prst="rect">
-            <a:avLst/>
-          </a:prstGeom>
-        </p:spPr>
-      </p:pic>
       <p:sp>
         <p:nvSpPr>
           <p:cNvPr name="TextBox 3" id="3"/>
@@ -6062,25 +5522,7 @@
             <a:spAutoFit/>
           </a:bodyPr>
           <a:lstStyle/>
-          <a:p>
-            <a:pPr algn="l" marL="0" indent="0" lvl="0">
-              <a:lnSpc>
-                <a:spcPts val="10800"/>
-              </a:lnSpc>
-            </a:pPr>
-            <a:r>
-              <a:rPr lang="en-US" b="true" sz="9000">
-                <a:solidFill>
-                  <a:srgbClr val="0C1116"/>
-                </a:solidFill>
-                <a:latin typeface="Ubuntu Bold"/>
-                <a:ea typeface="Ubuntu Bold"/>
-                <a:cs typeface="Ubuntu Bold"/>
-                <a:sym typeface="Ubuntu Bold"/>
-              </a:rPr>
-              <a:t>Projected Yearly Growth Overview</a:t>
-            </a:r>
-          </a:p>
+          <a:p/>
         </p:txBody>
       </p:sp>
       <p:sp>
@@ -6103,37 +5545,7 @@
             <a:spAutoFit/>
           </a:bodyPr>
           <a:lstStyle/>
-          <a:p>
-            <a:pPr algn="l" marL="0" indent="0" lvl="0">
-              <a:lnSpc>
-                <a:spcPts val="2730"/>
-              </a:lnSpc>
-            </a:pPr>
-            <a:r>
-              <a:rPr lang="en-US" sz="2100">
-                <a:solidFill>
-                  <a:srgbClr val="0C1116"/>
-                </a:solidFill>
-                <a:latin typeface="Ubuntu"/>
-                <a:ea typeface="Ubuntu"/>
-                <a:cs typeface="Ubuntu"/>
-                <a:sym typeface="Ubuntu"/>
-              </a:rPr>
-              <a:t>Ginya</a:t>
-            </a:r>
-            <a:r>
-              <a:rPr lang="en-US" sz="2100">
-                <a:solidFill>
-                  <a:srgbClr val="0C1116"/>
-                </a:solidFill>
-                <a:latin typeface="Ubuntu"/>
-                <a:ea typeface="Ubuntu"/>
-                <a:cs typeface="Ubuntu"/>
-                <a:sym typeface="Ubuntu"/>
-              </a:rPr>
-              <a:t>rd International Co.</a:t>
-            </a:r>
-          </a:p>
+          <a:p/>
         </p:txBody>
       </p:sp>
       <p:sp>
@@ -6156,25 +5568,7 @@
             <a:spAutoFit/>
           </a:bodyPr>
           <a:lstStyle/>
-          <a:p>
-            <a:pPr algn="l" marL="0" indent="0" lvl="0">
-              <a:lnSpc>
-                <a:spcPts val="3380"/>
-              </a:lnSpc>
-            </a:pPr>
-            <a:r>
-              <a:rPr lang="en-US" b="true" sz="2600">
-                <a:solidFill>
-                  <a:srgbClr val="0C1116"/>
-                </a:solidFill>
-                <a:latin typeface="Ubuntu Bold"/>
-                <a:ea typeface="Ubuntu Bold"/>
-                <a:cs typeface="Ubuntu Bold"/>
-                <a:sym typeface="Ubuntu Bold"/>
-              </a:rPr>
-              <a:t>Analyzing growth trends to inform future strategic decisions for our business.</a:t>
-            </a:r>
-          </a:p>
+          <a:p/>
         </p:txBody>
       </p:sp>
       <p:sp>
@@ -6197,49 +5591,7 @@
             <a:spAutoFit/>
           </a:bodyPr>
           <a:lstStyle/>
-          <a:p>
-            <a:pPr algn="l" marL="0" indent="0" lvl="0">
-              <a:lnSpc>
-                <a:spcPts val="3120"/>
-              </a:lnSpc>
-            </a:pPr>
-            <a:r>
-              <a:rPr lang="en-US" sz="2400">
-                <a:solidFill>
-                  <a:srgbClr val="0C1116"/>
-                </a:solidFill>
-                <a:latin typeface="Ubuntu"/>
-                <a:ea typeface="Ubuntu"/>
-                <a:cs typeface="Ubuntu"/>
-                <a:sym typeface="Ubuntu"/>
-              </a:rPr>
-              <a:t>This chart illustrates the </a:t>
-            </a:r>
-            <a:r>
-              <a:rPr lang="en-US" b="true" sz="2400">
-                <a:solidFill>
-                  <a:srgbClr val="0C1116"/>
-                </a:solidFill>
-                <a:latin typeface="Ubuntu Bold"/>
-                <a:ea typeface="Ubuntu Bold"/>
-                <a:cs typeface="Ubuntu Bold"/>
-                <a:sym typeface="Ubuntu Bold"/>
-              </a:rPr>
-              <a:t>anticipated growth rates</a:t>
-            </a:r>
-            <a:r>
-              <a:rPr lang="en-US" sz="2400">
-                <a:solidFill>
-                  <a:srgbClr val="0C1116"/>
-                </a:solidFill>
-                <a:latin typeface="Ubuntu"/>
-                <a:ea typeface="Ubuntu"/>
-                <a:cs typeface="Ubuntu"/>
-                <a:sym typeface="Ubuntu"/>
-              </a:rPr>
-              <a:t> across different sectors, helping us understand where to focus our resources for maximum impact.</a:t>
-            </a:r>
-          </a:p>
+          <a:p/>
         </p:txBody>
       </p:sp>
       <p:sp>
@@ -6293,6 +5645,10 @@
             </a:stretch>
           </a:blipFill>
         </p:spPr>
+        <p:txBody>
+          <a:bodyPr/>
+          <a:p/>
+        </p:txBody>
       </p:sp>
     </p:spTree>
   </p:cSld>
@@ -6358,25 +5714,7 @@
             <a:spAutoFit/>
           </a:bodyPr>
           <a:lstStyle/>
-          <a:p>
-            <a:pPr algn="l" marL="0" indent="0" lvl="0">
-              <a:lnSpc>
-                <a:spcPts val="10800"/>
-              </a:lnSpc>
-            </a:pPr>
-            <a:r>
-              <a:rPr lang="en-US" b="true" sz="9000">
-                <a:solidFill>
-                  <a:srgbClr val="0C1116"/>
-                </a:solidFill>
-                <a:latin typeface="Ubuntu Bold"/>
-                <a:ea typeface="Ubuntu Bold"/>
-                <a:cs typeface="Ubuntu Bold"/>
-                <a:sym typeface="Ubuntu Bold"/>
-              </a:rPr>
-              <a:t>Long-Term Goals: Our Strategic Roadmap</a:t>
-            </a:r>
-          </a:p>
+          <a:p/>
         </p:txBody>
       </p:sp>
       <p:sp>
@@ -6399,37 +5737,7 @@
             <a:spAutoFit/>
           </a:bodyPr>
           <a:lstStyle/>
-          <a:p>
-            <a:pPr algn="l" marL="0" indent="0" lvl="0">
-              <a:lnSpc>
-                <a:spcPts val="2730"/>
-              </a:lnSpc>
-            </a:pPr>
-            <a:r>
-              <a:rPr lang="en-US" sz="2100">
-                <a:solidFill>
-                  <a:srgbClr val="0C1116"/>
-                </a:solidFill>
-                <a:latin typeface="Ubuntu"/>
-                <a:ea typeface="Ubuntu"/>
-                <a:cs typeface="Ubuntu"/>
-                <a:sym typeface="Ubuntu"/>
-              </a:rPr>
-              <a:t>Ginya</a:t>
-            </a:r>
-            <a:r>
-              <a:rPr lang="en-US" sz="2100">
-                <a:solidFill>
-                  <a:srgbClr val="0C1116"/>
-                </a:solidFill>
-                <a:latin typeface="Ubuntu"/>
-                <a:ea typeface="Ubuntu"/>
-                <a:cs typeface="Ubuntu"/>
-                <a:sym typeface="Ubuntu"/>
-              </a:rPr>
-              <a:t>rd International Co.</a:t>
-            </a:r>
-          </a:p>
+          <a:p/>
         </p:txBody>
       </p:sp>
       <p:grpSp>
@@ -6553,30 +5861,6 @@
           </p:txBody>
         </p:sp>
       </p:grpSp>
-      <p:pic>
-        <p:nvPicPr>
-          <p:cNvPr name="Picture 7" id="7"/>
-          <p:cNvPicPr>
-            <a:picLocks noChangeAspect="true"/>
-          </p:cNvPicPr>
-          <p:nvPr/>
-        </p:nvPicPr>
-        <p:blipFill>
-          <a:blip r:embed="rId2"/>
-          <a:stretch>
-            <a:fillRect/>
-          </a:stretch>
-        </p:blipFill>
-        <p:spPr>
-          <a:xfrm rot="0">
-            <a:off x="8233269" y="4235107"/>
-            <a:ext cx="9846580" cy="5736216"/>
-          </a:xfrm>
-          <a:prstGeom prst="rect">
-            <a:avLst/>
-          </a:prstGeom>
-        </p:spPr>
-      </p:pic>
       <p:sp>
         <p:nvSpPr>
           <p:cNvPr name="Freeform 8" id="8"/>
@@ -6628,6 +5912,10 @@
             </a:stretch>
           </a:blipFill>
         </p:spPr>
+        <p:txBody>
+          <a:bodyPr/>
+          <a:p/>
+        </p:txBody>
       </p:sp>
     </p:spTree>
   </p:cSld>
@@ -6696,6 +5984,10 @@
             <a:tailEnd type="none" len="sm" w="sm"/>
           </a:ln>
         </p:spPr>
+        <p:txBody>
+          <a:bodyPr/>
+          <a:p/>
+        </p:txBody>
       </p:sp>
       <p:sp>
         <p:nvSpPr>
@@ -6720,6 +6012,10 @@
             <a:tailEnd type="none" len="sm" w="sm"/>
           </a:ln>
         </p:spPr>
+        <p:txBody>
+          <a:bodyPr/>
+          <a:p/>
+        </p:txBody>
       </p:sp>
       <p:sp>
         <p:nvSpPr>
@@ -6744,6 +6040,10 @@
             <a:tailEnd type="none" len="sm" w="sm"/>
           </a:ln>
         </p:spPr>
+        <p:txBody>
+          <a:bodyPr/>
+          <a:p/>
+        </p:txBody>
       </p:sp>
       <p:grpSp>
         <p:nvGrpSpPr>
@@ -6823,28 +6123,7 @@
             <a:spAutoFit/>
           </a:bodyPr>
           <a:lstStyle/>
-          <a:p>
-            <a:pPr algn="ctr" marL="0" indent="0" lvl="0">
-              <a:lnSpc>
-                <a:spcPts val="6216"/>
-              </a:lnSpc>
-              <a:spcBef>
-                <a:spcPct val="0"/>
-              </a:spcBef>
-            </a:pPr>
-            <a:r>
-              <a:rPr lang="en-US" b="true" sz="5180" strike="noStrike" u="none">
-                <a:solidFill>
-                  <a:srgbClr val="0C1116"/>
-                </a:solidFill>
-                <a:latin typeface="Ubuntu Bold"/>
-                <a:ea typeface="Ubuntu Bold"/>
-                <a:cs typeface="Ubuntu Bold"/>
-                <a:sym typeface="Ubuntu Bold"/>
-              </a:rPr>
-              <a:t>Client Testimonials for Our Services</a:t>
-            </a:r>
-          </a:p>
+          <a:p/>
         </p:txBody>
       </p:sp>
       <p:grpSp>
@@ -7323,6 +6602,10 @@
             </a:stretch>
           </a:blipFill>
         </p:spPr>
+        <p:txBody>
+          <a:bodyPr/>
+          <a:p/>
+        </p:txBody>
       </p:sp>
     </p:spTree>
   </p:cSld>
